--- a/dist/초4/과학/생물과기체/초4_과학_생물과기체_01_생태계와먹이관계.pptx
+++ b/dist/초4/과학/생물과기체/초4_과학_생물과기체_01_생태계와먹이관계.pptx
@@ -123,13 +123,13 @@
   <p:extLst>
     <p:ext uri="{521415D9-36F7-43E2-AB2F-B90AF26B5E84}">
       <p14:sectionLst xmlns:p14="http://schemas.microsoft.com/office/powerpoint/2010/main">
-        <p14:section name="도입" id="{2bf1c464-5739-26e9-24e5-6678d8c042ff}">
+        <p14:section name="도입" id="{9106afeb-ec6c-321d-d02e-354c6bbfb813}">
           <p14:sldIdLst>
             <p14:sldId id="256"/>
             <p14:sldId id="257"/>
           </p14:sldIdLst>
         </p14:section>
-        <p14:section name="개념" id="{1cff6697-31b7-a810-99d1-b8d9d61888b2}">
+        <p14:section name="개념" id="{c32e84b3-752a-46fa-7c33-4139a5c90f09}">
           <p14:sldIdLst>
             <p14:sldId id="258"/>
             <p14:sldId id="259"/>
@@ -137,7 +137,7 @@
             <p14:sldId id="263"/>
           </p14:sldIdLst>
         </p14:section>
-        <p14:section name="연습" id="{729a9a43-a334-2690-d6a3-6099697c1782}">
+        <p14:section name="연습" id="{94d75070-8662-7e7a-e57d-9ed4fc13c680}">
           <p14:sldIdLst>
             <p14:sldId id="260"/>
             <p14:sldId id="262"/>
@@ -147,31 +147,31 @@
             <p14:sldId id="267"/>
           </p14:sldIdLst>
         </p14:section>
-        <p14:section name="개념" id="{4ae2662c-17ca-b67a-6f7e-8a4cd2d9d3e5}">
+        <p14:section name="개념" id="{47e62250-b61a-52b1-5df2-49360ed80774}">
           <p14:sldIdLst/>
         </p14:section>
-        <p14:section name="연습" id="{a7bdcead-83e3-9e57-b1cd-cbe1be68ede5}">
+        <p14:section name="연습" id="{3fc906f6-f26d-0ee3-c2ce-1b8f05dacf00}">
           <p14:sldIdLst/>
         </p14:section>
-        <p14:section name="개념" id="{d7dffac1-7099-f5b2-41ec-66d8cd38b3ef}">
+        <p14:section name="개념" id="{b1446a0a-7cf2-1f99-e690-5561ca928932}">
           <p14:sldIdLst/>
         </p14:section>
-        <p14:section name="연습" id="{12f111af-b585-7506-fdd7-44827d38e9b3}">
+        <p14:section name="연습" id="{1c45426a-ff00-7c96-59b1-5de34d34be97}">
           <p14:sldIdLst/>
         </p14:section>
-        <p14:section name="확인" id="{448b800a-3c53-f538-5445-e46043d9ce61}">
+        <p14:section name="확인" id="{2ed01786-155a-52cb-fdde-41067b69b843}">
           <p14:sldIdLst>
             <p14:sldId id="268"/>
             <p14:sldId id="269"/>
             <p14:sldId id="270"/>
           </p14:sldIdLst>
         </p14:section>
-        <p14:section name="정리" id="{2db793e9-1cda-0779-099c-984e41842b34}">
+        <p14:section name="정리" id="{0d18d22f-dff0-0438-cc67-8428641b2e45}">
           <p14:sldIdLst>
             <p14:sldId id="271"/>
           </p14:sldIdLst>
         </p14:section>
-        <p14:section name="보충" id="{5d1cdee3-a430-8a79-d106-d5670d6a85f8}">
+        <p14:section name="보충" id="{eb92689b-380b-3a1e-04ac-39e717481eb5}">
           <p14:sldIdLst>
             <p14:sldId id="272"/>
           </p14:sldIdLst>
@@ -1380,18 +1380,19 @@
           <a:p>
             <a:r>
               <a:rPr lang="en-US" dirty="0"/>
-              <a:t>[S17 · 선수 학습 보충(동물의 먹이)]
-목적: S02 ②③이 흔들리면, 동물이 다른 생물을 먹고 산다는 것과 식물은 먹지 않는다는 것을 먼저 익힙니다.
+              <a:t>[S17 · 선수 학습 보충(식물과 동물이 자라는 데 필요한 것)]
+목적: S02가 흔들리면, 식물은 햇빛과 물로 자라고 동물은 다른 생물을 먹고 자란다는 차이를 먼저 익힙니다. 오늘 생산자와 소비자를 나눌 때 필요합니다.
 시간: 약 4분
 이렇게 말해 보세요
+- “강낭콩을 기를 때 무엇을 해 주었지? 강낭콩은 무언가를 잡아먹었어?”
 - “토끼는 무엇을 먹지? 개구리는? 표를 같이 읽어 보자.”
-- “그럼 풀은 무엇을 먹을까? 풀도 무언가를 잡아먹을까?”
 예상 답
-- “개구리는 곤충을 먹어요.” “풀은 아무것도 안 먹어요. 햇빛을 받아요.”
+- “물을 주고 햇빛에 두었어요.” “강낭콩은 아무것도 안 먹어요.” “개구리는 곤충을 먹어요.”
 막히면
-- 그림책이나 도감에서 동물이 먹이를 먹는 장면을 함께 찾아봅니다.
+- 집에 있는 화분을 보며 ‘햇빛이 드는 쪽으로 잎이 향해 있는지’ 함께 살펴봅니다. 그림책이나 도감에서 동물이 먹이를 먹는 장면을 찾아봅니다.
 주의
-- 이 차시는 계획상 선수 차시가 없습니다. 동물의 생김새와 생활이 낯설면 초3 ‘동물의 생김새와 생활’(KR22-G03-SCI-ANIMAL-L01)을 함께 봅니다.
+- 계획상 선수 차시는 초3 ‘식물의 한살이’(KR22-G03-SCI-PLANTLIFE-L01)입니다. 보충으로도 어려우면 그 차시를 먼저 합니다. 동물의 먹이가 낯설면 초3 ‘동물의 생김새와 생활’(KR22-G03-SCI-ANIMAL-L01)을 함께 봅니다.
+- 식물이 햇빛을 받아 스스로 양분을 만드는 것은 S04에서 다룹니다.
 - 보충이 오래 걸리면 오늘은 여기까지 하고 다음 날 S02부터 다시 시작합니다.</a:t>
             </a:r>
             <a:endParaRPr lang="en-US" dirty="0"/>
@@ -1480,21 +1481,22 @@
           <a:p>
             <a:r>
               <a:rPr lang="en-US" dirty="0"/>
-              <a:t>[S02 · 선수 학습 확인(지난 시간, 동물의 먹이)]
-목적: 앞 차시 ‘태양계’를 복습하고, 오늘 먹이 사슬을 만들 때 필요한 ‘동물은 다른 생물을 먹고 산다’는 경험을 확인합니다. 이 차시는 계획상 선수 차시가 없습니다.
+              <a:t>[S02 · 선수 학습 확인(식물의 한살이, 동물의 먹이)]
+목적: 계획상 선수 차시인 초3 ‘식물의 한살이’(KR22-G03-SCI-PLANTLIFE-L01)에서 배운 식물이 자라는 모습과, 오늘 먹이 사슬을 만들 때 필요한 ‘동물은 다른 생물을 먹고 산다’는 경험을 확인합니다. ②는 식물이 햇빛을 받아 스스로 양분을 만든다(S04)는 내용으로 이어집니다.
 시간: 약 2분
 이렇게 말해 보세요
-- “① 지난 시간에 종이 띠로 재어 보니 가장 큰 행성은 무엇이었지?”
-- “② 토끼는 무엇을 먹을까? ③ 개구리는?”
+- “① 3학년 때 강낭콩을 심어 기른 것 기억나? 씨에서 시작해서 어떻게 자랐지?”
+- “② 강낭콩 화분은 어디에 두고, 무엇을 주어야 잘 자랄까?”
+- “③ 토끼는 무엇을 먹을까? 개구리는?”
 정답
-- ① 목성
-- ② 풀, 채소 같은 식물
-- ③ 메뚜기·파리 같은 곤충(작은 동물)
+- ① 씨 → 싹 트기 → 잎과 줄기 자라기 → 꽃 피기 → 열매 맺기(열매 속에 다시 씨가 생김)
+- ② 햇빛이 잘 드는 곳에 두고 물을 준다(알맞은 온도도 맞음)
+- ③ 토끼는 풀·채소 같은 식물, 개구리는 메뚜기·파리 같은 곤충
 막히면
-- ①이 흔들리면 앞 차시(KR22-G04-SCI-PLANETS-L01) S08을 다시 봅니다.
-- ②③이 어려우면 S17(보충)을 먼저 합니다. 보충으로도 어려우면 초3 ‘동물의 생김새와 생활’(KR22-G03-SCI-ANIMAL-L01)을 함께 봅니다.
+- ①②가 어려우면 S17(보충)을 먼저 합니다. 보충으로도 어려우면 초3 ‘식물의 한살이’(KR22-G03-SCI-PLANTLIFE-L01)를 먼저 합니다.
+- ③이 어려우면 S17의 표를 함께 읽고, 동물의 생활이 낯설면 초3 ‘동물의 생김새와 생활’(KR22-G03-SCI-ANIMAL-L01)도 함께 봅니다.
 주의
-- ②③은 ‘무엇을 먹는가’만 확인합니다. 먹이 사슬은 S06에서 배웁니다.</a:t>
+- ②에서 ‘흙을 먹어요’라고 답하면 그대로 두고, S04에서 식물은 햇빛을 받아 스스로 양분을 만든다는 것으로 바로잡습니다(오해 M2).</a:t>
             </a:r>
             <a:endParaRPr lang="en-US" dirty="0"/>
           </a:p>
@@ -8220,7 +8222,7 @@
                 <a:ea typeface="맑은 고딕" pitchFamily="34" charset="-122"/>
                 <a:cs typeface="맑은 고딕" pitchFamily="34" charset="-120"/>
               </a:rPr>
-              <a:t>보충: 무엇을 먹고 살까?</a:t>
+              <a:t>보충: 무엇이 있어야 자랄까?</a:t>
             </a:r>
             <a:endParaRPr lang="ko-KR" sz="4000" dirty="0"/>
           </a:p>
@@ -8259,7 +8261,7 @@
                 <a:ea typeface="맑은 고딕" pitchFamily="34" charset="-122"/>
                 <a:cs typeface="맑은 고딕" pitchFamily="34" charset="-120"/>
               </a:rPr>
-              <a:t>동물은 다른 생물을 먹고 살아요.</a:t>
+              <a:t>식물과 동물이 자라는 데 필요한 것을 비교해요.</a:t>
             </a:r>
             <a:endParaRPr lang="ko-KR" sz="3000" dirty="0"/>
           </a:p>
@@ -8328,7 +8330,7 @@
                 <a:ea typeface="맑은 고딕" pitchFamily="34" charset="-122"/>
                 <a:cs typeface="맑은 고딕" pitchFamily="34" charset="-120"/>
               </a:rPr>
-              <a:t>식물은 다른 생물을 먹지 않고 스스로 양분을 만들어요.</a:t>
+              <a:t>식물은 다른 생물을 먹지 않고, 동물은 다른 생물을 먹어요.</a:t>
             </a:r>
             <a:endParaRPr lang="ko-KR" sz="3000" dirty="0"/>
           </a:p>
@@ -8349,16 +8351,16 @@
           </p:nvPr>
         </p:nvGraphicFramePr>
         <p:xfrm>
-          <a:off x="1979676" y="2284730"/>
-          <a:ext cx="8229600" cy="914400"/>
+          <a:off x="1522476" y="2284730"/>
+          <a:ext cx="9144000" cy="914400"/>
         </p:xfrm>
         <a:graphic>
           <a:graphicData uri="http://schemas.openxmlformats.org/drawingml/2006/table">
             <a:tbl>
               <a:tblPr/>
               <a:tblGrid>
-                <a:gridCol w="2880360"/>
-                <a:gridCol w="5349240"/>
+                <a:gridCol w="2743200"/>
+                <a:gridCol w="6400800"/>
               </a:tblGrid>
               <a:tr h="512572">
                 <a:tc>
@@ -8378,7 +8380,7 @@
                           <a:ea typeface="맑은 고딕" pitchFamily="34" charset="-122"/>
                           <a:cs typeface="맑은 고딕" pitchFamily="34" charset="-120"/>
                         </a:rPr>
-                        <a:t>동물</a:t>
+                        <a:t>생물</a:t>
                       </a:r>
                       <a:endParaRPr lang="en-US" sz="2600" dirty="0">
                         <a:latin typeface="맑은 고딕" charset="0"/>
@@ -8446,7 +8448,7 @@
                           <a:ea typeface="맑은 고딕" pitchFamily="34" charset="-122"/>
                           <a:cs typeface="맑은 고딕" pitchFamily="34" charset="-120"/>
                         </a:rPr>
-                        <a:t>먹이</a:t>
+                        <a:t>자라는 데 필요한 것</a:t>
                       </a:r>
                       <a:endParaRPr lang="en-US" sz="2600" dirty="0">
                         <a:latin typeface="맑은 고딕" charset="0"/>
@@ -8494,6 +8496,144 @@
                     </a:lnB>
                     <a:solidFill>
                       <a:srgbClr val="EAF3F1"/>
+                    </a:solidFill>
+                  </a:tcPr>
+                </a:tc>
+              </a:tr>
+              <a:tr h="512572">
+                <a:tc>
+                  <a:txBody>
+                    <a:bodyPr/>
+                    <a:lstStyle/>
+                    <a:p>
+                      <a:pPr eaLnBrk="0" algn="ctr" indent="0" marL="0">
+                        <a:buNone/>
+                      </a:pPr>
+                      <a:r>
+                        <a:rPr lang="en-US" sz="2600" dirty="0">
+                          <a:solidFill>
+                            <a:srgbClr val="1F2937"/>
+                          </a:solidFill>
+                          <a:latin typeface="맑은 고딕" pitchFamily="34" charset="0"/>
+                          <a:ea typeface="맑은 고딕" pitchFamily="34" charset="-122"/>
+                          <a:cs typeface="맑은 고딕" pitchFamily="34" charset="-120"/>
+                        </a:rPr>
+                        <a:t>강낭콩</a:t>
+                      </a:r>
+                      <a:endParaRPr lang="en-US" sz="2600" dirty="0">
+                        <a:latin typeface="맑은 고딕" charset="0"/>
+                        <a:ea typeface="맑은 고딕" charset="0"/>
+                        <a:cs typeface="맑은 고딕" charset="0"/>
+                      </a:endParaRPr>
+                    </a:p>
+                  </a:txBody>
+                  <a:tcPr marL="38100" marR="38100" marT="38100" marB="38100" anchor="ctr">
+                    <a:lnL w="12700" cap="flat" cmpd="sng" algn="ctr">
+                      <a:solidFill>
+                        <a:srgbClr val="94A3B8"/>
+                      </a:solidFill>
+                      <a:prstDash val="solid"/>
+                      <a:round/>
+                      <a:headEnd type="none" w="med" len="med"/>
+                      <a:tailEnd type="none" w="med" len="med"/>
+                    </a:lnL>
+                    <a:lnR w="12700" cap="flat" cmpd="sng" algn="ctr">
+                      <a:solidFill>
+                        <a:srgbClr val="94A3B8"/>
+                      </a:solidFill>
+                      <a:prstDash val="solid"/>
+                      <a:round/>
+                      <a:headEnd type="none" w="med" len="med"/>
+                      <a:tailEnd type="none" w="med" len="med"/>
+                    </a:lnR>
+                    <a:lnT w="12700" cap="flat" cmpd="sng" algn="ctr">
+                      <a:solidFill>
+                        <a:srgbClr val="94A3B8"/>
+                      </a:solidFill>
+                      <a:prstDash val="solid"/>
+                      <a:round/>
+                      <a:headEnd type="none" w="med" len="med"/>
+                      <a:tailEnd type="none" w="med" len="med"/>
+                    </a:lnT>
+                    <a:lnB w="12700" cap="flat" cmpd="sng" algn="ctr">
+                      <a:solidFill>
+                        <a:srgbClr val="94A3B8"/>
+                      </a:solidFill>
+                      <a:prstDash val="solid"/>
+                      <a:round/>
+                      <a:headEnd type="none" w="med" len="med"/>
+                      <a:tailEnd type="none" w="med" len="med"/>
+                    </a:lnB>
+                    <a:solidFill>
+                      <a:srgbClr val="FFFFFF"/>
+                    </a:solidFill>
+                  </a:tcPr>
+                </a:tc>
+                <a:tc>
+                  <a:txBody>
+                    <a:bodyPr/>
+                    <a:lstStyle/>
+                    <a:p>
+                      <a:pPr eaLnBrk="0" algn="ctr" indent="0" marL="0">
+                        <a:buNone/>
+                      </a:pPr>
+                      <a:r>
+                        <a:rPr lang="en-US" sz="2600" dirty="0">
+                          <a:solidFill>
+                            <a:srgbClr val="1F2937"/>
+                          </a:solidFill>
+                          <a:latin typeface="맑은 고딕" pitchFamily="34" charset="0"/>
+                          <a:ea typeface="맑은 고딕" pitchFamily="34" charset="-122"/>
+                          <a:cs typeface="맑은 고딕" pitchFamily="34" charset="-120"/>
+                        </a:rPr>
+                        <a:t>햇빛, 물, 알맞은 온도</a:t>
+                      </a:r>
+                      <a:endParaRPr lang="en-US" sz="2600" dirty="0">
+                        <a:latin typeface="맑은 고딕" charset="0"/>
+                        <a:ea typeface="맑은 고딕" charset="0"/>
+                        <a:cs typeface="맑은 고딕" charset="0"/>
+                      </a:endParaRPr>
+                    </a:p>
+                  </a:txBody>
+                  <a:tcPr marL="38100" marR="38100" marT="38100" marB="38100" anchor="ctr">
+                    <a:lnL w="12700" cap="flat" cmpd="sng" algn="ctr">
+                      <a:solidFill>
+                        <a:srgbClr val="94A3B8"/>
+                      </a:solidFill>
+                      <a:prstDash val="solid"/>
+                      <a:round/>
+                      <a:headEnd type="none" w="med" len="med"/>
+                      <a:tailEnd type="none" w="med" len="med"/>
+                    </a:lnL>
+                    <a:lnR w="12700" cap="flat" cmpd="sng" algn="ctr">
+                      <a:solidFill>
+                        <a:srgbClr val="94A3B8"/>
+                      </a:solidFill>
+                      <a:prstDash val="solid"/>
+                      <a:round/>
+                      <a:headEnd type="none" w="med" len="med"/>
+                      <a:tailEnd type="none" w="med" len="med"/>
+                    </a:lnR>
+                    <a:lnT w="12700" cap="flat" cmpd="sng" algn="ctr">
+                      <a:solidFill>
+                        <a:srgbClr val="94A3B8"/>
+                      </a:solidFill>
+                      <a:prstDash val="solid"/>
+                      <a:round/>
+                      <a:headEnd type="none" w="med" len="med"/>
+                      <a:tailEnd type="none" w="med" len="med"/>
+                    </a:lnT>
+                    <a:lnB w="12700" cap="flat" cmpd="sng" algn="ctr">
+                      <a:solidFill>
+                        <a:srgbClr val="94A3B8"/>
+                      </a:solidFill>
+                      <a:prstDash val="solid"/>
+                      <a:round/>
+                      <a:headEnd type="none" w="med" len="med"/>
+                      <a:tailEnd type="none" w="med" len="med"/>
+                    </a:lnB>
+                    <a:solidFill>
+                      <a:srgbClr val="FFFFFF"/>
                     </a:solidFill>
                   </a:tcPr>
                 </a:tc>
@@ -8584,145 +8724,7 @@
                           <a:ea typeface="맑은 고딕" pitchFamily="34" charset="-122"/>
                           <a:cs typeface="맑은 고딕" pitchFamily="34" charset="-120"/>
                         </a:rPr>
-                        <a:t>풀, 채소</a:t>
-                      </a:r>
-                      <a:endParaRPr lang="en-US" sz="2600" dirty="0">
-                        <a:latin typeface="맑은 고딕" charset="0"/>
-                        <a:ea typeface="맑은 고딕" charset="0"/>
-                        <a:cs typeface="맑은 고딕" charset="0"/>
-                      </a:endParaRPr>
-                    </a:p>
-                  </a:txBody>
-                  <a:tcPr marL="38100" marR="38100" marT="38100" marB="38100" anchor="ctr">
-                    <a:lnL w="12700" cap="flat" cmpd="sng" algn="ctr">
-                      <a:solidFill>
-                        <a:srgbClr val="94A3B8"/>
-                      </a:solidFill>
-                      <a:prstDash val="solid"/>
-                      <a:round/>
-                      <a:headEnd type="none" w="med" len="med"/>
-                      <a:tailEnd type="none" w="med" len="med"/>
-                    </a:lnL>
-                    <a:lnR w="12700" cap="flat" cmpd="sng" algn="ctr">
-                      <a:solidFill>
-                        <a:srgbClr val="94A3B8"/>
-                      </a:solidFill>
-                      <a:prstDash val="solid"/>
-                      <a:round/>
-                      <a:headEnd type="none" w="med" len="med"/>
-                      <a:tailEnd type="none" w="med" len="med"/>
-                    </a:lnR>
-                    <a:lnT w="12700" cap="flat" cmpd="sng" algn="ctr">
-                      <a:solidFill>
-                        <a:srgbClr val="94A3B8"/>
-                      </a:solidFill>
-                      <a:prstDash val="solid"/>
-                      <a:round/>
-                      <a:headEnd type="none" w="med" len="med"/>
-                      <a:tailEnd type="none" w="med" len="med"/>
-                    </a:lnT>
-                    <a:lnB w="12700" cap="flat" cmpd="sng" algn="ctr">
-                      <a:solidFill>
-                        <a:srgbClr val="94A3B8"/>
-                      </a:solidFill>
-                      <a:prstDash val="solid"/>
-                      <a:round/>
-                      <a:headEnd type="none" w="med" len="med"/>
-                      <a:tailEnd type="none" w="med" len="med"/>
-                    </a:lnB>
-                    <a:solidFill>
-                      <a:srgbClr val="FFFFFF"/>
-                    </a:solidFill>
-                  </a:tcPr>
-                </a:tc>
-              </a:tr>
-              <a:tr h="512572">
-                <a:tc>
-                  <a:txBody>
-                    <a:bodyPr/>
-                    <a:lstStyle/>
-                    <a:p>
-                      <a:pPr eaLnBrk="0" algn="ctr" indent="0" marL="0">
-                        <a:buNone/>
-                      </a:pPr>
-                      <a:r>
-                        <a:rPr lang="en-US" sz="2600" dirty="0">
-                          <a:solidFill>
-                            <a:srgbClr val="1F2937"/>
-                          </a:solidFill>
-                          <a:latin typeface="맑은 고딕" pitchFamily="34" charset="0"/>
-                          <a:ea typeface="맑은 고딕" pitchFamily="34" charset="-122"/>
-                          <a:cs typeface="맑은 고딕" pitchFamily="34" charset="-120"/>
-                        </a:rPr>
-                        <a:t>메뚜기</a:t>
-                      </a:r>
-                      <a:endParaRPr lang="en-US" sz="2600" dirty="0">
-                        <a:latin typeface="맑은 고딕" charset="0"/>
-                        <a:ea typeface="맑은 고딕" charset="0"/>
-                        <a:cs typeface="맑은 고딕" charset="0"/>
-                      </a:endParaRPr>
-                    </a:p>
-                  </a:txBody>
-                  <a:tcPr marL="38100" marR="38100" marT="38100" marB="38100" anchor="ctr">
-                    <a:lnL w="12700" cap="flat" cmpd="sng" algn="ctr">
-                      <a:solidFill>
-                        <a:srgbClr val="94A3B8"/>
-                      </a:solidFill>
-                      <a:prstDash val="solid"/>
-                      <a:round/>
-                      <a:headEnd type="none" w="med" len="med"/>
-                      <a:tailEnd type="none" w="med" len="med"/>
-                    </a:lnL>
-                    <a:lnR w="12700" cap="flat" cmpd="sng" algn="ctr">
-                      <a:solidFill>
-                        <a:srgbClr val="94A3B8"/>
-                      </a:solidFill>
-                      <a:prstDash val="solid"/>
-                      <a:round/>
-                      <a:headEnd type="none" w="med" len="med"/>
-                      <a:tailEnd type="none" w="med" len="med"/>
-                    </a:lnR>
-                    <a:lnT w="12700" cap="flat" cmpd="sng" algn="ctr">
-                      <a:solidFill>
-                        <a:srgbClr val="94A3B8"/>
-                      </a:solidFill>
-                      <a:prstDash val="solid"/>
-                      <a:round/>
-                      <a:headEnd type="none" w="med" len="med"/>
-                      <a:tailEnd type="none" w="med" len="med"/>
-                    </a:lnT>
-                    <a:lnB w="12700" cap="flat" cmpd="sng" algn="ctr">
-                      <a:solidFill>
-                        <a:srgbClr val="94A3B8"/>
-                      </a:solidFill>
-                      <a:prstDash val="solid"/>
-                      <a:round/>
-                      <a:headEnd type="none" w="med" len="med"/>
-                      <a:tailEnd type="none" w="med" len="med"/>
-                    </a:lnB>
-                    <a:solidFill>
-                      <a:srgbClr val="FFFFFF"/>
-                    </a:solidFill>
-                  </a:tcPr>
-                </a:tc>
-                <a:tc>
-                  <a:txBody>
-                    <a:bodyPr/>
-                    <a:lstStyle/>
-                    <a:p>
-                      <a:pPr eaLnBrk="0" algn="ctr" indent="0" marL="0">
-                        <a:buNone/>
-                      </a:pPr>
-                      <a:r>
-                        <a:rPr lang="en-US" sz="2600" dirty="0">
-                          <a:solidFill>
-                            <a:srgbClr val="1F2937"/>
-                          </a:solidFill>
-                          <a:latin typeface="맑은 고딕" pitchFamily="34" charset="0"/>
-                          <a:ea typeface="맑은 고딕" pitchFamily="34" charset="-122"/>
-                          <a:cs typeface="맑은 고딕" pitchFamily="34" charset="-120"/>
-                        </a:rPr>
-                        <a:t>벼, 풀의 잎</a:t>
+                        <a:t>풀, 채소를 먹어요</a:t>
                       </a:r>
                       <a:endParaRPr lang="en-US" sz="2600" dirty="0">
                         <a:latin typeface="맑은 고딕" charset="0"/>
@@ -8860,7 +8862,7 @@
                           <a:ea typeface="맑은 고딕" pitchFamily="34" charset="-122"/>
                           <a:cs typeface="맑은 고딕" pitchFamily="34" charset="-120"/>
                         </a:rPr>
-                        <a:t>파리, 메뚜기 같은 곤충</a:t>
+                        <a:t>메뚜기 같은 곤충을 먹어요</a:t>
                       </a:r>
                       <a:endParaRPr lang="en-US" sz="2600" dirty="0">
                         <a:latin typeface="맑은 고딕" charset="0"/>
@@ -8998,7 +9000,7 @@
                           <a:ea typeface="맑은 고딕" pitchFamily="34" charset="-122"/>
                           <a:cs typeface="맑은 고딕" pitchFamily="34" charset="-120"/>
                         </a:rPr>
-                        <a:t>곡식, 곤충</a:t>
+                        <a:t>곡식, 곤충을 먹어요</a:t>
                       </a:r>
                       <a:endParaRPr lang="en-US" sz="2600" dirty="0">
                         <a:latin typeface="맑은 고딕" charset="0"/>
@@ -9162,7 +9164,7 @@
                 <a:ea typeface="맑은 고딕" pitchFamily="34" charset="-122"/>
                 <a:cs typeface="맑은 고딕" pitchFamily="34" charset="-120"/>
               </a:rPr>
-              <a:t>먼저 떠올려요</a:t>
+              <a:t>3학년 기억하기</a:t>
             </a:r>
             <a:endParaRPr lang="ko-KR" sz="4000" dirty="0"/>
           </a:p>
@@ -9248,7 +9250,24 @@
                 <a:ea typeface="맑은 고딕" pitchFamily="34" charset="-122"/>
                 <a:cs typeface="맑은 고딕" pitchFamily="34" charset="-120"/>
               </a:rPr>
-              <a:t>태양계에서 가장 큰 행성은?</a:t>
+              <a:t>강낭콩의 한살이를</a:t>
+            </a:r>
+            <a:endParaRPr lang="ko-KR" sz="3000" dirty="0"/>
+          </a:p>
+          <a:p>
+            <a:pPr eaLnBrk="0" algn="l" indent="0" marL="0">
+              <a:buNone/>
+            </a:pPr>
+            <a:r>
+              <a:rPr lang="ko-KR" altLang="en-US" sz="3000" dirty="0">
+                <a:solidFill>
+                  <a:srgbClr val="1F2937"/>
+                </a:solidFill>
+                <a:latin typeface="맑은 고딕" pitchFamily="34" charset="0"/>
+                <a:ea typeface="맑은 고딕" pitchFamily="34" charset="-122"/>
+                <a:cs typeface="맑은 고딕" pitchFamily="34" charset="-120"/>
+              </a:rPr>
+              <a:t>차례대로 말해요.</a:t>
             </a:r>
             <a:endParaRPr lang="ko-KR" sz="3000" dirty="0"/>
           </a:p>
@@ -9334,7 +9353,24 @@
                 <a:ea typeface="맑은 고딕" pitchFamily="34" charset="-122"/>
                 <a:cs typeface="맑은 고딕" pitchFamily="34" charset="-120"/>
               </a:rPr>
-              <a:t>토끼는 무엇을 먹고 살까요?</a:t>
+              <a:t>강낭콩이 잘 자라려면</a:t>
+            </a:r>
+            <a:endParaRPr lang="ko-KR" sz="3000" dirty="0"/>
+          </a:p>
+          <a:p>
+            <a:pPr eaLnBrk="0" algn="l" indent="0" marL="0">
+              <a:buNone/>
+            </a:pPr>
+            <a:r>
+              <a:rPr lang="ko-KR" altLang="en-US" sz="3000" dirty="0">
+                <a:solidFill>
+                  <a:srgbClr val="1F2937"/>
+                </a:solidFill>
+                <a:latin typeface="맑은 고딕" pitchFamily="34" charset="0"/>
+                <a:ea typeface="맑은 고딕" pitchFamily="34" charset="-122"/>
+                <a:cs typeface="맑은 고딕" pitchFamily="34" charset="-120"/>
+              </a:rPr>
+              <a:t>무엇이 필요할까요?</a:t>
             </a:r>
             <a:endParaRPr lang="ko-KR" sz="3000" dirty="0"/>
           </a:p>
@@ -9420,7 +9456,24 @@
                 <a:ea typeface="맑은 고딕" pitchFamily="34" charset="-122"/>
                 <a:cs typeface="맑은 고딕" pitchFamily="34" charset="-120"/>
               </a:rPr>
-              <a:t>개구리는 무엇을 먹고 살까요?</a:t>
+              <a:t>토끼와 개구리는</a:t>
+            </a:r>
+            <a:endParaRPr lang="ko-KR" sz="3000" dirty="0"/>
+          </a:p>
+          <a:p>
+            <a:pPr eaLnBrk="0" algn="l" indent="0" marL="0">
+              <a:buNone/>
+            </a:pPr>
+            <a:r>
+              <a:rPr lang="ko-KR" altLang="en-US" sz="3000" dirty="0">
+                <a:solidFill>
+                  <a:srgbClr val="1F2937"/>
+                </a:solidFill>
+                <a:latin typeface="맑은 고딕" pitchFamily="34" charset="0"/>
+                <a:ea typeface="맑은 고딕" pitchFamily="34" charset="-122"/>
+                <a:cs typeface="맑은 고딕" pitchFamily="34" charset="-120"/>
+              </a:rPr>
+              <a:t>무엇을 먹고 살까요?</a:t>
             </a:r>
             <a:endParaRPr lang="ko-KR" sz="3000" dirty="0"/>
           </a:p>

--- a/dist/초4/과학/생물과기체/초4_과학_생물과기체_01_생태계와먹이관계.pptx
+++ b/dist/초4/과학/생물과기체/초4_과학_생물과기체_01_생태계와먹이관계.pptx
@@ -123,13 +123,13 @@
   <p:extLst>
     <p:ext uri="{521415D9-36F7-43E2-AB2F-B90AF26B5E84}">
       <p14:sectionLst xmlns:p14="http://schemas.microsoft.com/office/powerpoint/2010/main">
-        <p14:section name="도입" id="{9106afeb-ec6c-321d-d02e-354c6bbfb813}">
+        <p14:section name="도입" id="{b8626e1a-497b-921c-12a2-229cc509b6d2}">
           <p14:sldIdLst>
             <p14:sldId id="256"/>
             <p14:sldId id="257"/>
           </p14:sldIdLst>
         </p14:section>
-        <p14:section name="개념" id="{c32e84b3-752a-46fa-7c33-4139a5c90f09}">
+        <p14:section name="개념" id="{0150621e-d54c-e0c7-3d4d-a20d88e0f2b5}">
           <p14:sldIdLst>
             <p14:sldId id="258"/>
             <p14:sldId id="259"/>
@@ -137,7 +137,7 @@
             <p14:sldId id="263"/>
           </p14:sldIdLst>
         </p14:section>
-        <p14:section name="연습" id="{94d75070-8662-7e7a-e57d-9ed4fc13c680}">
+        <p14:section name="연습" id="{cdbfd2ea-176b-e3a4-5f31-71606411ce04}">
           <p14:sldIdLst>
             <p14:sldId id="260"/>
             <p14:sldId id="262"/>
@@ -147,31 +147,31 @@
             <p14:sldId id="267"/>
           </p14:sldIdLst>
         </p14:section>
-        <p14:section name="개념" id="{47e62250-b61a-52b1-5df2-49360ed80774}">
+        <p14:section name="개념" id="{444d3af3-a4e3-7bb4-0795-10ca78429051}">
           <p14:sldIdLst/>
         </p14:section>
-        <p14:section name="연습" id="{3fc906f6-f26d-0ee3-c2ce-1b8f05dacf00}">
+        <p14:section name="연습" id="{7ac33198-f719-d57b-71f4-1eeff9cc3712}">
           <p14:sldIdLst/>
         </p14:section>
-        <p14:section name="개념" id="{b1446a0a-7cf2-1f99-e690-5561ca928932}">
+        <p14:section name="개념" id="{2ac1b8af-fc7f-e720-d007-33c846b6d96f}">
           <p14:sldIdLst/>
         </p14:section>
-        <p14:section name="연습" id="{1c45426a-ff00-7c96-59b1-5de34d34be97}">
+        <p14:section name="연습" id="{0d2f975c-9e05-fd1a-3af5-78c1390feba6}">
           <p14:sldIdLst/>
         </p14:section>
-        <p14:section name="확인" id="{2ed01786-155a-52cb-fdde-41067b69b843}">
+        <p14:section name="확인" id="{4b428ccd-e265-5838-b92e-872b54b040b8}">
           <p14:sldIdLst>
             <p14:sldId id="268"/>
             <p14:sldId id="269"/>
             <p14:sldId id="270"/>
           </p14:sldIdLst>
         </p14:section>
-        <p14:section name="정리" id="{0d18d22f-dff0-0438-cc67-8428641b2e45}">
+        <p14:section name="정리" id="{cd1c279a-bb8f-2da5-bf79-8532d5f8a6de}">
           <p14:sldIdLst>
             <p14:sldId id="271"/>
           </p14:sldIdLst>
         </p14:section>
-        <p14:section name="보충" id="{eb92689b-380b-3a1e-04ac-39e717481eb5}">
+        <p14:section name="보충" id="{c3d670ae-f57e-39e9-592c-5fe08b24aef1}">
           <p14:sldIdLst>
             <p14:sldId id="272"/>
           </p14:sldIdLst>
